--- a/docs/ms2/MS2-Geschenke-Manager.pptx
+++ b/docs/ms2/MS2-Geschenke-Manager.pptx
@@ -1740,312 +1740,420 @@
           </a:p>
         </p:txBody>
       </p:sp>
+      <p:sp>
+        <p:nvSpPr>
+          <p:cNvPr id="5" name="Text 2"/>
+          <p:cNvSpPr txBox="1"/>
+          <p:nvPr/>
+        </p:nvSpPr>
+        <p:spPr>
+          <a:xfrm>
+            <a:off x="640080" y="4709160"/>
+            <a:ext cx="2560320" cy="457200"/>
+          </a:xfrm>
+          <a:prstGeom prst="rect">
+            <a:avLst/>
+          </a:prstGeom>
+          <a:noFill/>
+          <a:ln/>
+        </p:spPr>
+        <p:txBody>
+          <a:bodyPr wrap="square" lIns="0" tIns="0" rIns="0" bIns="0" rtlCol="0" anchor="ctr"/>
+          <a:lstStyle/>
+          <a:p>
+            <a:pPr marL="0" indent="0" algn="ctr">
+              <a:buNone/>
+            </a:pPr>
+            <a:r>
+              <a:rPr lang="en-US" sz="1500" b="1" dirty="0">
+                <a:solidFill>
+                  <a:srgbClr val="2B2430"/>
+                </a:solidFill>
+                <a:latin typeface="Calibri" pitchFamily="34" charset="0"/>
+                <a:ea typeface="Calibri" pitchFamily="34" charset="-122"/>
+                <a:cs typeface="Calibri" pitchFamily="34" charset="-120"/>
+              </a:rPr>
+              <a:t>Kevin Jordan Taghu</a:t>
+            </a:r>
+            <a:endParaRPr lang="en-US" sz="1500" dirty="0"/>
+          </a:p>
+        </p:txBody>
+      </p:sp>
+      <p:sp>
+        <p:nvSpPr>
+          <p:cNvPr id="6" name="Text 3"/>
+          <p:cNvSpPr txBox="1"/>
+          <p:nvPr/>
+        </p:nvSpPr>
+        <p:spPr>
+          <a:xfrm>
+            <a:off x="640080" y="5120640"/>
+            <a:ext cx="2560320" cy="548640"/>
+          </a:xfrm>
+          <a:prstGeom prst="rect">
+            <a:avLst/>
+          </a:prstGeom>
+          <a:noFill/>
+          <a:ln/>
+        </p:spPr>
+        <p:txBody>
+          <a:bodyPr wrap="square" lIns="0" tIns="0" rIns="0" bIns="0" rtlCol="0" anchor="ctr"/>
+          <a:lstStyle/>
+          <a:p>
+            <a:pPr marL="0" indent="0" algn="ctr">
+              <a:buNone/>
+            </a:pPr>
+            <a:r>
+              <a:rPr lang="en-US" sz="1250" dirty="0">
+                <a:solidFill>
+                  <a:srgbClr val="7A6E74"/>
+                </a:solidFill>
+                <a:latin typeface="Calibri" pitchFamily="34" charset="0"/>
+                <a:ea typeface="Calibri" pitchFamily="34" charset="-122"/>
+                <a:cs typeface="Calibri" pitchFamily="34" charset="-120"/>
+              </a:rPr>
+              <a:t>Projektleitung &amp; Datenmodell</a:t>
+            </a:r>
+            <a:endParaRPr lang="en-US" sz="1250" dirty="0"/>
+          </a:p>
+        </p:txBody>
+      </p:sp>
+      <p:sp>
+        <p:nvSpPr>
+          <p:cNvPr id="8" name="Text 4"/>
+          <p:cNvSpPr txBox="1"/>
+          <p:nvPr/>
+        </p:nvSpPr>
+        <p:spPr>
+          <a:xfrm>
+            <a:off x="3429000" y="4709160"/>
+            <a:ext cx="2560320" cy="457200"/>
+          </a:xfrm>
+          <a:prstGeom prst="rect">
+            <a:avLst/>
+          </a:prstGeom>
+          <a:noFill/>
+          <a:ln/>
+        </p:spPr>
+        <p:txBody>
+          <a:bodyPr wrap="square" lIns="0" tIns="0" rIns="0" bIns="0" rtlCol="0" anchor="ctr"/>
+          <a:lstStyle/>
+          <a:p>
+            <a:pPr marL="0" indent="0" algn="ctr">
+              <a:buNone/>
+            </a:pPr>
+            <a:r>
+              <a:rPr lang="en-US" sz="1500" b="1" dirty="0">
+                <a:solidFill>
+                  <a:srgbClr val="2B2430"/>
+                </a:solidFill>
+                <a:latin typeface="Calibri" pitchFamily="34" charset="0"/>
+                <a:ea typeface="Calibri" pitchFamily="34" charset="-122"/>
+                <a:cs typeface="Calibri" pitchFamily="34" charset="-120"/>
+              </a:rPr>
+              <a:t>Julian Ammann</a:t>
+            </a:r>
+            <a:endParaRPr lang="en-US" sz="1500" dirty="0"/>
+          </a:p>
+        </p:txBody>
+      </p:sp>
+      <p:sp>
+        <p:nvSpPr>
+          <p:cNvPr id="9" name="Text 5"/>
+          <p:cNvSpPr txBox="1"/>
+          <p:nvPr/>
+        </p:nvSpPr>
+        <p:spPr>
+          <a:xfrm>
+            <a:off x="3429000" y="5120640"/>
+            <a:ext cx="2560320" cy="548640"/>
+          </a:xfrm>
+          <a:prstGeom prst="rect">
+            <a:avLst/>
+          </a:prstGeom>
+          <a:noFill/>
+          <a:ln/>
+        </p:spPr>
+        <p:txBody>
+          <a:bodyPr wrap="square" lIns="0" tIns="0" rIns="0" bIns="0" rtlCol="0" anchor="ctr"/>
+          <a:lstStyle/>
+          <a:p>
+            <a:pPr marL="0" indent="0" algn="ctr">
+              <a:buNone/>
+            </a:pPr>
+            <a:r>
+              <a:rPr lang="en-US" sz="1250" dirty="0">
+                <a:solidFill>
+                  <a:srgbClr val="7A6E74"/>
+                </a:solidFill>
+                <a:latin typeface="Calibri" pitchFamily="34" charset="0"/>
+                <a:ea typeface="Calibri" pitchFamily="34" charset="-122"/>
+                <a:cs typeface="Calibri" pitchFamily="34" charset="-120"/>
+              </a:rPr>
+              <a:t>Technische Leitung &amp; Full-Stack</a:t>
+            </a:r>
+            <a:endParaRPr lang="en-US" sz="1250" dirty="0"/>
+          </a:p>
+        </p:txBody>
+      </p:sp>
+      <p:sp>
+        <p:nvSpPr>
+          <p:cNvPr id="11" name="Text 6"/>
+          <p:cNvSpPr txBox="1"/>
+          <p:nvPr/>
+        </p:nvSpPr>
+        <p:spPr>
+          <a:xfrm>
+            <a:off x="6217920" y="4709160"/>
+            <a:ext cx="2560320" cy="457200"/>
+          </a:xfrm>
+          <a:prstGeom prst="rect">
+            <a:avLst/>
+          </a:prstGeom>
+          <a:noFill/>
+          <a:ln/>
+        </p:spPr>
+        <p:txBody>
+          <a:bodyPr wrap="square" lIns="0" tIns="0" rIns="0" bIns="0" rtlCol="0" anchor="ctr"/>
+          <a:lstStyle/>
+          <a:p>
+            <a:pPr marL="0" indent="0" algn="ctr">
+              <a:buNone/>
+            </a:pPr>
+            <a:r>
+              <a:rPr lang="en-US" sz="1500" b="1" dirty="0">
+                <a:solidFill>
+                  <a:srgbClr val="2B2430"/>
+                </a:solidFill>
+                <a:latin typeface="Calibri" pitchFamily="34" charset="0"/>
+                <a:ea typeface="Calibri" pitchFamily="34" charset="-122"/>
+                <a:cs typeface="Calibri" pitchFamily="34" charset="-120"/>
+              </a:rPr>
+              <a:t>Yin Yin Wu-Hanke</a:t>
+            </a:r>
+            <a:endParaRPr lang="en-US" sz="1500" dirty="0"/>
+          </a:p>
+        </p:txBody>
+      </p:sp>
+      <p:sp>
+        <p:nvSpPr>
+          <p:cNvPr id="12" name="Text 7"/>
+          <p:cNvSpPr txBox="1"/>
+          <p:nvPr/>
+        </p:nvSpPr>
+        <p:spPr>
+          <a:xfrm>
+            <a:off x="6217920" y="5120640"/>
+            <a:ext cx="2560320" cy="548640"/>
+          </a:xfrm>
+          <a:prstGeom prst="rect">
+            <a:avLst/>
+          </a:prstGeom>
+          <a:noFill/>
+          <a:ln/>
+        </p:spPr>
+        <p:txBody>
+          <a:bodyPr wrap="square" lIns="0" tIns="0" rIns="0" bIns="0" rtlCol="0" anchor="ctr"/>
+          <a:lstStyle/>
+          <a:p>
+            <a:pPr marL="0" indent="0" algn="ctr">
+              <a:buNone/>
+            </a:pPr>
+            <a:r>
+              <a:rPr lang="en-US" sz="1250" dirty="0">
+                <a:solidFill>
+                  <a:srgbClr val="7A6E74"/>
+                </a:solidFill>
+                <a:latin typeface="Calibri" pitchFamily="34" charset="0"/>
+                <a:ea typeface="Calibri" pitchFamily="34" charset="-122"/>
+                <a:cs typeface="Calibri" pitchFamily="34" charset="-120"/>
+              </a:rPr>
+              <a:t>Security &amp; Frontend</a:t>
+            </a:r>
+            <a:endParaRPr lang="en-US" sz="1250" dirty="0"/>
+          </a:p>
+        </p:txBody>
+      </p:sp>
+      <p:sp>
+        <p:nvSpPr>
+          <p:cNvPr id="14" name="Text 8"/>
+          <p:cNvSpPr txBox="1"/>
+          <p:nvPr/>
+        </p:nvSpPr>
+        <p:spPr>
+          <a:xfrm>
+            <a:off x="9006840" y="4709160"/>
+            <a:ext cx="2560320" cy="457200"/>
+          </a:xfrm>
+          <a:prstGeom prst="rect">
+            <a:avLst/>
+          </a:prstGeom>
+          <a:noFill/>
+          <a:ln/>
+        </p:spPr>
+        <p:txBody>
+          <a:bodyPr wrap="square" lIns="0" tIns="0" rIns="0" bIns="0" rtlCol="0" anchor="ctr"/>
+          <a:lstStyle/>
+          <a:p>
+            <a:pPr marL="0" indent="0" algn="ctr">
+              <a:buNone/>
+            </a:pPr>
+            <a:r>
+              <a:rPr lang="en-US" sz="1500" b="1" dirty="0">
+                <a:solidFill>
+                  <a:srgbClr val="2B2430"/>
+                </a:solidFill>
+                <a:latin typeface="Calibri" pitchFamily="34" charset="0"/>
+                <a:ea typeface="Calibri" pitchFamily="34" charset="-122"/>
+                <a:cs typeface="Calibri" pitchFamily="34" charset="-120"/>
+              </a:rPr>
+              <a:t>Anton Hirsch</a:t>
+            </a:r>
+            <a:endParaRPr lang="en-US" sz="1500" dirty="0"/>
+          </a:p>
+        </p:txBody>
+      </p:sp>
+      <p:sp>
+        <p:nvSpPr>
+          <p:cNvPr id="15" name="Text 9"/>
+          <p:cNvSpPr txBox="1"/>
+          <p:nvPr/>
+        </p:nvSpPr>
+        <p:spPr>
+          <a:xfrm>
+            <a:off x="9006840" y="5120640"/>
+            <a:ext cx="2560320" cy="548640"/>
+          </a:xfrm>
+          <a:prstGeom prst="rect">
+            <a:avLst/>
+          </a:prstGeom>
+          <a:noFill/>
+          <a:ln/>
+        </p:spPr>
+        <p:txBody>
+          <a:bodyPr wrap="square" lIns="0" tIns="0" rIns="0" bIns="0" rtlCol="0" anchor="ctr"/>
+          <a:lstStyle/>
+          <a:p>
+            <a:pPr marL="0" indent="0" algn="ctr">
+              <a:buNone/>
+            </a:pPr>
+            <a:r>
+              <a:rPr lang="en-US" sz="1250" dirty="0">
+                <a:solidFill>
+                  <a:srgbClr val="7A6E74"/>
+                </a:solidFill>
+                <a:latin typeface="Calibri" pitchFamily="34" charset="0"/>
+                <a:ea typeface="Calibri" pitchFamily="34" charset="-122"/>
+                <a:cs typeface="Calibri" pitchFamily="34" charset="-120"/>
+              </a:rPr>
+              <a:t>Anforderungen &amp; Dokumentation</a:t>
+            </a:r>
+            <a:endParaRPr lang="en-US" sz="1250" dirty="0"/>
+          </a:p>
+        </p:txBody>
+      </p:sp>
       <p:pic>
         <p:nvPicPr>
-          <p:cNvPr id="4" name="Image 0" descr="../Overleaf-MS1-flat/team_jordan.png"/>
+          <p:cNvPr id="17" name="Grafik 16">
+            <a:extLst>
+              <a:ext uri="{FF2B5EF4-FFF2-40B4-BE49-F238E27FC236}">
+                <a16:creationId xmlns:a16="http://schemas.microsoft.com/office/drawing/2014/main" id="{57818BEF-EA51-46BA-BD2B-59815601EC75}"/>
+              </a:ext>
+            </a:extLst>
+          </p:cNvPr>
           <p:cNvPicPr>
             <a:picLocks noChangeAspect="1"/>
           </p:cNvPicPr>
           <p:nvPr/>
         </p:nvPicPr>
-        <p:blipFill>
+        <p:blipFill rotWithShape="1">
           <a:blip r:embed="rId3"/>
-          <a:srcRect/>
-          <a:stretch/>
+          <a:srcRect l="8758" r="9887"/>
+          <a:stretch>
+            <a:fillRect/>
+          </a:stretch>
         </p:blipFill>
         <p:spPr>
           <a:xfrm>
-            <a:off x="822960" y="1874520"/>
-            <a:ext cx="2194560" cy="2697480"/>
+            <a:off x="6385561" y="1874520"/>
+            <a:ext cx="2194561" cy="2697480"/>
           </a:xfrm>
           <a:prstGeom prst="rect">
             <a:avLst/>
           </a:prstGeom>
         </p:spPr>
       </p:pic>
-      <p:sp>
-        <p:nvSpPr>
-          <p:cNvPr id="5" name="Text 2"/>
-          <p:cNvSpPr txBox="1"/>
-          <p:nvPr/>
-        </p:nvSpPr>
-        <p:spPr>
-          <a:xfrm>
-            <a:off x="640080" y="4709160"/>
-            <a:ext cx="2560320" cy="457200"/>
-          </a:xfrm>
-          <a:prstGeom prst="rect">
-            <a:avLst/>
-          </a:prstGeom>
-          <a:noFill/>
-          <a:ln/>
-        </p:spPr>
-        <p:txBody>
-          <a:bodyPr wrap="square" lIns="0" tIns="0" rIns="0" bIns="0" rtlCol="0" anchor="ctr"/>
-          <a:lstStyle/>
-          <a:p>
-            <a:pPr marL="0" indent="0" algn="ctr">
-              <a:buNone/>
-            </a:pPr>
-            <a:r>
-              <a:rPr lang="en-US" sz="1500" b="1" dirty="0">
-                <a:solidFill>
-                  <a:srgbClr val="2B2430"/>
-                </a:solidFill>
-                <a:latin typeface="Calibri" pitchFamily="34" charset="0"/>
-                <a:ea typeface="Calibri" pitchFamily="34" charset="-122"/>
-                <a:cs typeface="Calibri" pitchFamily="34" charset="-120"/>
-              </a:rPr>
-              <a:t>Kevin Jordan Taghu</a:t>
-            </a:r>
-            <a:endParaRPr lang="en-US" sz="1500" dirty="0"/>
-          </a:p>
-        </p:txBody>
-      </p:sp>
-      <p:sp>
-        <p:nvSpPr>
-          <p:cNvPr id="6" name="Text 3"/>
-          <p:cNvSpPr txBox="1"/>
-          <p:nvPr/>
-        </p:nvSpPr>
-        <p:spPr>
-          <a:xfrm>
-            <a:off x="640080" y="5120640"/>
-            <a:ext cx="2560320" cy="548640"/>
-          </a:xfrm>
-          <a:prstGeom prst="rect">
-            <a:avLst/>
-          </a:prstGeom>
-          <a:noFill/>
-          <a:ln/>
-        </p:spPr>
-        <p:txBody>
-          <a:bodyPr wrap="square" lIns="0" tIns="0" rIns="0" bIns="0" rtlCol="0" anchor="ctr"/>
-          <a:lstStyle/>
-          <a:p>
-            <a:pPr marL="0" indent="0" algn="ctr">
-              <a:buNone/>
-            </a:pPr>
-            <a:r>
-              <a:rPr lang="en-US" sz="1250" dirty="0">
-                <a:solidFill>
-                  <a:srgbClr val="7A6E74"/>
-                </a:solidFill>
-                <a:latin typeface="Calibri" pitchFamily="34" charset="0"/>
-                <a:ea typeface="Calibri" pitchFamily="34" charset="-122"/>
-                <a:cs typeface="Calibri" pitchFamily="34" charset="-120"/>
-              </a:rPr>
-              <a:t>Projektleitung &amp; Datenmodell</a:t>
-            </a:r>
-            <a:endParaRPr lang="en-US" sz="1250" dirty="0"/>
-          </a:p>
-        </p:txBody>
-      </p:sp>
       <p:pic>
         <p:nvPicPr>
-          <p:cNvPr id="7" name="Image 1" descr="../Overleaf-MS1-flat/team_julian.jpg"/>
+          <p:cNvPr id="19" name="Grafik 18">
+            <a:extLst>
+              <a:ext uri="{FF2B5EF4-FFF2-40B4-BE49-F238E27FC236}">
+                <a16:creationId xmlns:a16="http://schemas.microsoft.com/office/drawing/2014/main" id="{B294BE77-56AC-F440-3311-EAB59F7DA045}"/>
+              </a:ext>
+            </a:extLst>
+          </p:cNvPr>
           <p:cNvPicPr>
             <a:picLocks noChangeAspect="1"/>
           </p:cNvPicPr>
           <p:nvPr/>
         </p:nvPicPr>
-        <p:blipFill>
+        <p:blipFill rotWithShape="1">
           <a:blip r:embed="rId4"/>
-          <a:srcRect/>
-          <a:stretch/>
+          <a:srcRect t="5766" b="12474"/>
+          <a:stretch>
+            <a:fillRect/>
+          </a:stretch>
         </p:blipFill>
         <p:spPr>
           <a:xfrm>
-            <a:off x="3611880" y="1874520"/>
-            <a:ext cx="2194560" cy="2697480"/>
+            <a:off x="833272" y="1874521"/>
+            <a:ext cx="2199487" cy="2697480"/>
           </a:xfrm>
           <a:prstGeom prst="rect">
             <a:avLst/>
           </a:prstGeom>
         </p:spPr>
       </p:pic>
-      <p:sp>
-        <p:nvSpPr>
-          <p:cNvPr id="8" name="Text 4"/>
-          <p:cNvSpPr txBox="1"/>
-          <p:nvPr/>
-        </p:nvSpPr>
-        <p:spPr>
-          <a:xfrm>
-            <a:off x="3429000" y="4709160"/>
-            <a:ext cx="2560320" cy="457200"/>
-          </a:xfrm>
-          <a:prstGeom prst="rect">
-            <a:avLst/>
-          </a:prstGeom>
-          <a:noFill/>
-          <a:ln/>
-        </p:spPr>
-        <p:txBody>
-          <a:bodyPr wrap="square" lIns="0" tIns="0" rIns="0" bIns="0" rtlCol="0" anchor="ctr"/>
-          <a:lstStyle/>
-          <a:p>
-            <a:pPr marL="0" indent="0" algn="ctr">
-              <a:buNone/>
-            </a:pPr>
-            <a:r>
-              <a:rPr lang="en-US" sz="1500" b="1" dirty="0">
-                <a:solidFill>
-                  <a:srgbClr val="2B2430"/>
-                </a:solidFill>
-                <a:latin typeface="Calibri" pitchFamily="34" charset="0"/>
-                <a:ea typeface="Calibri" pitchFamily="34" charset="-122"/>
-                <a:cs typeface="Calibri" pitchFamily="34" charset="-120"/>
-              </a:rPr>
-              <a:t>Julian Ammann</a:t>
-            </a:r>
-            <a:endParaRPr lang="en-US" sz="1500" dirty="0"/>
-          </a:p>
-        </p:txBody>
-      </p:sp>
-      <p:sp>
-        <p:nvSpPr>
-          <p:cNvPr id="9" name="Text 5"/>
-          <p:cNvSpPr txBox="1"/>
-          <p:nvPr/>
-        </p:nvSpPr>
-        <p:spPr>
-          <a:xfrm>
-            <a:off x="3429000" y="5120640"/>
-            <a:ext cx="2560320" cy="548640"/>
-          </a:xfrm>
-          <a:prstGeom prst="rect">
-            <a:avLst/>
-          </a:prstGeom>
-          <a:noFill/>
-          <a:ln/>
-        </p:spPr>
-        <p:txBody>
-          <a:bodyPr wrap="square" lIns="0" tIns="0" rIns="0" bIns="0" rtlCol="0" anchor="ctr"/>
-          <a:lstStyle/>
-          <a:p>
-            <a:pPr marL="0" indent="0" algn="ctr">
-              <a:buNone/>
-            </a:pPr>
-            <a:r>
-              <a:rPr lang="en-US" sz="1250" dirty="0">
-                <a:solidFill>
-                  <a:srgbClr val="7A6E74"/>
-                </a:solidFill>
-                <a:latin typeface="Calibri" pitchFamily="34" charset="0"/>
-                <a:ea typeface="Calibri" pitchFamily="34" charset="-122"/>
-                <a:cs typeface="Calibri" pitchFamily="34" charset="-120"/>
-              </a:rPr>
-              <a:t>Technische Leitung &amp; Full-Stack</a:t>
-            </a:r>
-            <a:endParaRPr lang="en-US" sz="1250" dirty="0"/>
-          </a:p>
-        </p:txBody>
-      </p:sp>
       <p:pic>
         <p:nvPicPr>
-          <p:cNvPr id="10" name="Image 2" descr="../Overleaf-MS1-flat/team_yin.jpg"/>
+          <p:cNvPr id="21" name="Grafik 20">
+            <a:extLst>
+              <a:ext uri="{FF2B5EF4-FFF2-40B4-BE49-F238E27FC236}">
+                <a16:creationId xmlns:a16="http://schemas.microsoft.com/office/drawing/2014/main" id="{41DE9B7C-AD77-CF04-5EEA-047200655AA5}"/>
+              </a:ext>
+            </a:extLst>
+          </p:cNvPr>
           <p:cNvPicPr>
             <a:picLocks noChangeAspect="1"/>
           </p:cNvPicPr>
           <p:nvPr/>
         </p:nvPicPr>
-        <p:blipFill>
+        <p:blipFill rotWithShape="1">
           <a:blip r:embed="rId5"/>
-          <a:srcRect/>
-          <a:stretch/>
+          <a:srcRect b="11940"/>
+          <a:stretch>
+            <a:fillRect/>
+          </a:stretch>
         </p:blipFill>
         <p:spPr>
           <a:xfrm>
-            <a:off x="6400800" y="1874520"/>
-            <a:ext cx="2194560" cy="2697480"/>
+            <a:off x="9158640" y="1874520"/>
+            <a:ext cx="2200088" cy="2697480"/>
           </a:xfrm>
           <a:prstGeom prst="rect">
             <a:avLst/>
           </a:prstGeom>
         </p:spPr>
       </p:pic>
-      <p:sp>
-        <p:nvSpPr>
-          <p:cNvPr id="11" name="Text 6"/>
-          <p:cNvSpPr txBox="1"/>
-          <p:nvPr/>
-        </p:nvSpPr>
-        <p:spPr>
-          <a:xfrm>
-            <a:off x="6217920" y="4709160"/>
-            <a:ext cx="2560320" cy="457200"/>
-          </a:xfrm>
-          <a:prstGeom prst="rect">
-            <a:avLst/>
-          </a:prstGeom>
-          <a:noFill/>
-          <a:ln/>
-        </p:spPr>
-        <p:txBody>
-          <a:bodyPr wrap="square" lIns="0" tIns="0" rIns="0" bIns="0" rtlCol="0" anchor="ctr"/>
-          <a:lstStyle/>
-          <a:p>
-            <a:pPr marL="0" indent="0" algn="ctr">
-              <a:buNone/>
-            </a:pPr>
-            <a:r>
-              <a:rPr lang="en-US" sz="1500" b="1" dirty="0">
-                <a:solidFill>
-                  <a:srgbClr val="2B2430"/>
-                </a:solidFill>
-                <a:latin typeface="Calibri" pitchFamily="34" charset="0"/>
-                <a:ea typeface="Calibri" pitchFamily="34" charset="-122"/>
-                <a:cs typeface="Calibri" pitchFamily="34" charset="-120"/>
-              </a:rPr>
-              <a:t>Yin Yin Wu-Hanke</a:t>
-            </a:r>
-            <a:endParaRPr lang="en-US" sz="1500" dirty="0"/>
-          </a:p>
-        </p:txBody>
-      </p:sp>
-      <p:sp>
-        <p:nvSpPr>
-          <p:cNvPr id="12" name="Text 7"/>
-          <p:cNvSpPr txBox="1"/>
-          <p:nvPr/>
-        </p:nvSpPr>
-        <p:spPr>
-          <a:xfrm>
-            <a:off x="6217920" y="5120640"/>
-            <a:ext cx="2560320" cy="548640"/>
-          </a:xfrm>
-          <a:prstGeom prst="rect">
-            <a:avLst/>
-          </a:prstGeom>
-          <a:noFill/>
-          <a:ln/>
-        </p:spPr>
-        <p:txBody>
-          <a:bodyPr wrap="square" lIns="0" tIns="0" rIns="0" bIns="0" rtlCol="0" anchor="ctr"/>
-          <a:lstStyle/>
-          <a:p>
-            <a:pPr marL="0" indent="0" algn="ctr">
-              <a:buNone/>
-            </a:pPr>
-            <a:r>
-              <a:rPr lang="en-US" sz="1250" dirty="0">
-                <a:solidFill>
-                  <a:srgbClr val="7A6E74"/>
-                </a:solidFill>
-                <a:latin typeface="Calibri" pitchFamily="34" charset="0"/>
-                <a:ea typeface="Calibri" pitchFamily="34" charset="-122"/>
-                <a:cs typeface="Calibri" pitchFamily="34" charset="-120"/>
-              </a:rPr>
-              <a:t>Security &amp; Frontend</a:t>
-            </a:r>
-            <a:endParaRPr lang="en-US" sz="1250" dirty="0"/>
-          </a:p>
-        </p:txBody>
-      </p:sp>
       <p:pic>
         <p:nvPicPr>
-          <p:cNvPr id="13" name="Image 3" descr="../Overleaf-MS1-flat/team_anton.jpg"/>
+          <p:cNvPr id="23" name="Grafik 22">
+            <a:extLst>
+              <a:ext uri="{FF2B5EF4-FFF2-40B4-BE49-F238E27FC236}">
+                <a16:creationId xmlns:a16="http://schemas.microsoft.com/office/drawing/2014/main" id="{1A35A1F9-3E4A-34A5-865D-9C0F924EE845}"/>
+              </a:ext>
+            </a:extLst>
+          </p:cNvPr>
           <p:cNvPicPr>
             <a:picLocks noChangeAspect="1"/>
           </p:cNvPicPr>
@@ -2053,97 +2161,21 @@
         </p:nvPicPr>
         <p:blipFill>
           <a:blip r:embed="rId6"/>
-          <a:srcRect/>
-          <a:stretch/>
+          <a:srcRect l="-69" t="1891" r="69" b="6022"/>
+          <a:stretch>
+            <a:fillRect/>
+          </a:stretch>
         </p:blipFill>
         <p:spPr>
           <a:xfrm>
-            <a:off x="9189720" y="1874520"/>
-            <a:ext cx="2194560" cy="2697480"/>
+            <a:off x="3608825" y="1874521"/>
+            <a:ext cx="2197615" cy="2697480"/>
           </a:xfrm>
           <a:prstGeom prst="rect">
             <a:avLst/>
           </a:prstGeom>
         </p:spPr>
       </p:pic>
-      <p:sp>
-        <p:nvSpPr>
-          <p:cNvPr id="14" name="Text 8"/>
-          <p:cNvSpPr txBox="1"/>
-          <p:nvPr/>
-        </p:nvSpPr>
-        <p:spPr>
-          <a:xfrm>
-            <a:off x="9006840" y="4709160"/>
-            <a:ext cx="2560320" cy="457200"/>
-          </a:xfrm>
-          <a:prstGeom prst="rect">
-            <a:avLst/>
-          </a:prstGeom>
-          <a:noFill/>
-          <a:ln/>
-        </p:spPr>
-        <p:txBody>
-          <a:bodyPr wrap="square" lIns="0" tIns="0" rIns="0" bIns="0" rtlCol="0" anchor="ctr"/>
-          <a:lstStyle/>
-          <a:p>
-            <a:pPr marL="0" indent="0" algn="ctr">
-              <a:buNone/>
-            </a:pPr>
-            <a:r>
-              <a:rPr lang="en-US" sz="1500" b="1" dirty="0">
-                <a:solidFill>
-                  <a:srgbClr val="2B2430"/>
-                </a:solidFill>
-                <a:latin typeface="Calibri" pitchFamily="34" charset="0"/>
-                <a:ea typeface="Calibri" pitchFamily="34" charset="-122"/>
-                <a:cs typeface="Calibri" pitchFamily="34" charset="-120"/>
-              </a:rPr>
-              <a:t>Anton Hirsch</a:t>
-            </a:r>
-            <a:endParaRPr lang="en-US" sz="1500" dirty="0"/>
-          </a:p>
-        </p:txBody>
-      </p:sp>
-      <p:sp>
-        <p:nvSpPr>
-          <p:cNvPr id="15" name="Text 9"/>
-          <p:cNvSpPr txBox="1"/>
-          <p:nvPr/>
-        </p:nvSpPr>
-        <p:spPr>
-          <a:xfrm>
-            <a:off x="9006840" y="5120640"/>
-            <a:ext cx="2560320" cy="548640"/>
-          </a:xfrm>
-          <a:prstGeom prst="rect">
-            <a:avLst/>
-          </a:prstGeom>
-          <a:noFill/>
-          <a:ln/>
-        </p:spPr>
-        <p:txBody>
-          <a:bodyPr wrap="square" lIns="0" tIns="0" rIns="0" bIns="0" rtlCol="0" anchor="ctr"/>
-          <a:lstStyle/>
-          <a:p>
-            <a:pPr marL="0" indent="0" algn="ctr">
-              <a:buNone/>
-            </a:pPr>
-            <a:r>
-              <a:rPr lang="en-US" sz="1250" dirty="0">
-                <a:solidFill>
-                  <a:srgbClr val="7A6E74"/>
-                </a:solidFill>
-                <a:latin typeface="Calibri" pitchFamily="34" charset="0"/>
-                <a:ea typeface="Calibri" pitchFamily="34" charset="-122"/>
-                <a:cs typeface="Calibri" pitchFamily="34" charset="-120"/>
-              </a:rPr>
-              <a:t>Anforderungen &amp; Dokumentation</a:t>
-            </a:r>
-            <a:endParaRPr lang="en-US" sz="1250" dirty="0"/>
-          </a:p>
-        </p:txBody>
-      </p:sp>
     </p:spTree>
   </p:cSld>
   <p:clrMapOvr>
